--- a/slides/08_Summarising_Groups.pptx
+++ b/slides/08_Summarising_Groups.pptx
@@ -130,7 +130,7 @@
   <p:extLst>
     <p:ext uri="{521415D9-36F7-43E2-AB2F-B90AF26B5E84}">
       <p14:sectionLst xmlns:p14="http://schemas.microsoft.com/office/powerpoint/2010/main">
-        <p14:section name="Introduction" id="{bb6b7661-9b4f-0326-88ed-be60de462b6d}">
+        <p14:section name="Introduction" id="{282f4ad7-7642-efa3-0962-fb4c54fa56f2}">
           <p14:sldIdLst>
             <p14:sldId id="256"/>
             <p14:sldId id="257"/>
@@ -139,7 +139,7 @@
             <p14:sldId id="260"/>
           </p14:sldIdLst>
         </p14:section>
-        <p14:section name="Comparing our two groups" id="{58ee154c-dfd4-13dc-265d-787e166276ea}">
+        <p14:section name="Comparing our two groups" id="{25b6999a-0396-43bd-b65c-ff7e8a635d9f}">
           <p14:sldIdLst>
             <p14:sldId id="261"/>
             <p14:sldId id="262"/>
@@ -148,7 +148,7 @@
             <p14:sldId id="265"/>
           </p14:sldIdLst>
         </p14:section>
-        <p14:section name="Mean or median?" id="{6c4a09b4-db77-8d5d-eb94-5e7c251b17d4}">
+        <p14:section name="Mean or median?" id="{05fa8225-90f9-f102-85e3-3f6bd81fe5aa}">
           <p14:sldIdLst>
             <p14:sldId id="266"/>
             <p14:sldId id="267"/>
@@ -159,7 +159,7 @@
             <p14:sldId id="272"/>
           </p14:sldIdLst>
         </p14:section>
-        <p14:section name="Games per year" id="{2206f436-62e4-e232-aa05-0466ec9e2080}">
+        <p14:section name="Games per year" id="{c1080442-c77a-f6f7-a4ee-5d593bd42746}">
           <p14:sldIdLst>
             <p14:sldId id="273"/>
             <p14:sldId id="274"/>
@@ -168,7 +168,7 @@
             <p14:sldId id="277"/>
           </p14:sldIdLst>
         </p14:section>
-        <p14:section name="Wrap up" id="{fa18906d-588f-66b4-7c8a-1feeb9345e21}">
+        <p14:section name="Wrap up" id="{278476a0-7069-6196-3d49-3e0820602a44}">
           <p14:sldIdLst>
             <p14:sldId id="278"/>
             <p14:sldId id="279"/>
@@ -6756,7 +6756,7 @@
               <a:t>We can use </a:t>
             </a:r>
             <a:r>
-              <a:rPr lang="en-US" sz="1800" dirty="0">
+              <a:rPr lang="en-US" sz="1800" b="1" dirty="0">
                 <a:solidFill>
                   <a:srgbClr val="B86E1E"/>
                 </a:solidFill>
@@ -6775,7 +6775,7 @@
               <a:t>, </a:t>
             </a:r>
             <a:r>
-              <a:rPr lang="en-US" sz="1800" dirty="0">
+              <a:rPr lang="en-US" sz="1800" b="1" dirty="0">
                 <a:solidFill>
                   <a:srgbClr val="B86E1E"/>
                 </a:solidFill>
@@ -6794,7 +6794,7 @@
               <a:t>, </a:t>
             </a:r>
             <a:r>
-              <a:rPr lang="en-US" sz="1800" dirty="0">
+              <a:rPr lang="en-US" sz="1800" b="1" dirty="0">
                 <a:solidFill>
                   <a:srgbClr val="B86E1E"/>
                 </a:solidFill>
@@ -6813,7 +6813,7 @@
               <a:t>, </a:t>
             </a:r>
             <a:r>
-              <a:rPr lang="en-US" sz="1800" dirty="0">
+              <a:rPr lang="en-US" sz="1800" b="1" dirty="0">
                 <a:solidFill>
                   <a:srgbClr val="B86E1E"/>
                 </a:solidFill>
@@ -6832,7 +6832,7 @@
               <a:t> and </a:t>
             </a:r>
             <a:r>
-              <a:rPr lang="en-US" sz="1800" dirty="0">
+              <a:rPr lang="en-US" sz="1800" b="1" dirty="0">
                 <a:solidFill>
                   <a:srgbClr val="B86E1E"/>
                 </a:solidFill>
@@ -6851,7 +6851,7 @@
               <a:t> on any column, and </a:t>
             </a:r>
             <a:r>
-              <a:rPr lang="en-US" sz="1800" dirty="0">
+              <a:rPr lang="en-US" sz="1800" b="1" dirty="0">
                 <a:solidFill>
                   <a:srgbClr val="B86E1E"/>
                 </a:solidFill>
@@ -6870,7 +6870,7 @@
               <a:t> to count rows. We can use as many as we like, each with its own </a:t>
             </a:r>
             <a:r>
-              <a:rPr lang="en-US" sz="1800" dirty="0">
+              <a:rPr lang="en-US" sz="1800" b="1" dirty="0">
                 <a:solidFill>
                   <a:srgbClr val="B86E1E"/>
                 </a:solidFill>
@@ -7794,7 +7794,7 @@
               <a:t>how to split data into groups with </a:t>
             </a:r>
             <a:r>
-              <a:rPr lang="en-US" sz="1800" dirty="0">
+              <a:rPr lang="en-US" sz="1800" b="1" dirty="0">
                 <a:solidFill>
                   <a:srgbClr val="B86E1E"/>
                 </a:solidFill>
@@ -7831,7 +7831,7 @@
               <a:t>how to summarise each group with </a:t>
             </a:r>
             <a:r>
-              <a:rPr lang="en-US" sz="1800" dirty="0">
+              <a:rPr lang="en-US" sz="1800" b="1" dirty="0">
                 <a:solidFill>
                   <a:srgbClr val="B86E1E"/>
                 </a:solidFill>
@@ -7868,7 +7868,7 @@
               <a:t>how to count rows with </a:t>
             </a:r>
             <a:r>
-              <a:rPr lang="en-US" sz="1800" dirty="0">
+              <a:rPr lang="en-US" sz="1800" b="1" dirty="0">
                 <a:solidFill>
                   <a:srgbClr val="B86E1E"/>
                 </a:solidFill>
@@ -8127,7 +8127,7 @@
               <a:t>Change </a:t>
             </a:r>
             <a:r>
-              <a:rPr lang="en-US" sz="1800" dirty="0">
+              <a:rPr lang="en-US" sz="1800" b="1" dirty="0">
                 <a:solidFill>
                   <a:srgbClr val="B86E1E"/>
                 </a:solidFill>
@@ -8146,7 +8146,7 @@
               <a:t> on line 2 to </a:t>
             </a:r>
             <a:r>
-              <a:rPr lang="en-US" sz="1800" dirty="0">
+              <a:rPr lang="en-US" sz="1800" b="1" dirty="0">
                 <a:solidFill>
                   <a:srgbClr val="B86E1E"/>
                 </a:solidFill>
@@ -8720,7 +8720,7 @@
               <a:t> game. A summary of one or two games isn't evidence of anything. When we compare groups, we check the </a:t>
             </a:r>
             <a:r>
-              <a:rPr lang="en-US" sz="1800" dirty="0">
+              <a:rPr lang="en-US" sz="1800" b="1" dirty="0">
                 <a:solidFill>
                   <a:srgbClr val="B86E1E"/>
                 </a:solidFill>
@@ -8923,7 +8923,7 @@
               <a:t>What does </a:t>
             </a:r>
             <a:r>
-              <a:rPr lang="en-US" sz="1800" dirty="0">
+              <a:rPr lang="en-US" sz="1800" b="1" dirty="0">
                 <a:solidFill>
                   <a:srgbClr val="E8A55A"/>
                 </a:solidFill>
@@ -9259,7 +9259,7 @@
               <a:t>Write a </a:t>
             </a:r>
             <a:r>
-              <a:rPr lang="en-US" sz="1400" dirty="0">
+              <a:rPr lang="en-US" sz="1400" b="1" dirty="0">
                 <a:solidFill>
                   <a:srgbClr val="B86E1E"/>
                 </a:solidFill>
@@ -10013,7 +10013,7 @@
               <a:t> the rows into groups, such as </a:t>
             </a:r>
             <a:r>
-              <a:rPr lang="en-US" sz="1500" dirty="0">
+              <a:rPr lang="en-US" sz="1500" b="1" dirty="0">
                 <a:solidFill>
                   <a:srgbClr val="B86E1E"/>
                 </a:solidFill>
@@ -10032,7 +10032,7 @@
               <a:t> and </a:t>
             </a:r>
             <a:r>
-              <a:rPr lang="en-US" sz="1500" dirty="0">
+              <a:rPr lang="en-US" sz="1500" b="1" dirty="0">
                 <a:solidFill>
                   <a:srgbClr val="B86E1E"/>
                 </a:solidFill>
@@ -10963,7 +10963,7 @@
               <a:t> → </a:t>
             </a:r>
             <a:r>
-              <a:rPr lang="en-US" sz="1500" dirty="0">
+              <a:rPr lang="en-US" sz="1500" b="1" dirty="0">
                 <a:solidFill>
                   <a:srgbClr val="B86E1E"/>
                 </a:solidFill>
@@ -10998,7 +10998,7 @@
               <a:t> the rows of </a:t>
             </a:r>
             <a:r>
-              <a:rPr lang="en-US" sz="1500" dirty="0">
+              <a:rPr lang="en-US" sz="1500" b="1" dirty="0">
                 <a:solidFill>
                   <a:srgbClr val="B86E1E"/>
                 </a:solidFill>
@@ -11017,7 +11017,7 @@
               <a:t> by </a:t>
             </a:r>
             <a:r>
-              <a:rPr lang="en-US" sz="1500" dirty="0">
+              <a:rPr lang="en-US" sz="1500" b="1" dirty="0">
                 <a:solidFill>
                   <a:srgbClr val="B86E1E"/>
                 </a:solidFill>
@@ -11062,7 +11062,7 @@
               <a:t> → </a:t>
             </a:r>
             <a:r>
-              <a:rPr lang="en-US" sz="1500" dirty="0">
+              <a:rPr lang="en-US" sz="1500" b="1" dirty="0">
                 <a:solidFill>
                   <a:srgbClr val="B86E1E"/>
                 </a:solidFill>
@@ -11131,7 +11131,7 @@
               <a:t> → </a:t>
             </a:r>
             <a:r>
-              <a:rPr lang="en-US" sz="1500" dirty="0">
+              <a:rPr lang="en-US" sz="1500" b="1" dirty="0">
                 <a:solidFill>
                   <a:srgbClr val="B86E1E"/>
                 </a:solidFill>
@@ -11150,7 +11150,7 @@
               <a:t> counts the rows in each group, named </a:t>
             </a:r>
             <a:r>
-              <a:rPr lang="en-US" sz="1500" dirty="0">
+              <a:rPr lang="en-US" sz="1500" b="1" dirty="0">
                 <a:solidFill>
                   <a:srgbClr val="B86E1E"/>
                 </a:solidFill>
@@ -11195,7 +11195,7 @@
               <a:t> → the median </a:t>
             </a:r>
             <a:r>
-              <a:rPr lang="en-US" sz="1500" dirty="0">
+              <a:rPr lang="en-US" sz="1500" b="1" dirty="0">
                 <a:solidFill>
                   <a:srgbClr val="B86E1E"/>
                 </a:solidFill>
@@ -11248,7 +11248,7 @@
               <a:t> → sorts by </a:t>
             </a:r>
             <a:r>
-              <a:rPr lang="en-US" sz="1500" dirty="0">
+              <a:rPr lang="en-US" sz="1500" b="1" dirty="0">
                 <a:solidFill>
                   <a:srgbClr val="B86E1E"/>
                 </a:solidFill>
@@ -11267,7 +11267,7 @@
               <a:t>, because </a:t>
             </a:r>
             <a:r>
-              <a:rPr lang="en-US" sz="1500" dirty="0">
+              <a:rPr lang="en-US" sz="1500" b="1" dirty="0">
                 <a:solidFill>
                   <a:srgbClr val="B86E1E"/>
                 </a:solidFill>
@@ -11508,7 +11508,7 @@
               <a:t>Add a line inside </a:t>
             </a:r>
             <a:r>
-              <a:rPr lang="en-US" sz="1800" dirty="0">
+              <a:rPr lang="en-US" sz="1800" b="1" dirty="0">
                 <a:solidFill>
                   <a:srgbClr val="B86E1E"/>
                 </a:solidFill>
@@ -11527,7 +11527,7 @@
               <a:t> that works out the median </a:t>
             </a:r>
             <a:r>
-              <a:rPr lang="en-US" sz="1800" dirty="0">
+              <a:rPr lang="en-US" sz="1800" b="1" dirty="0">
                 <a:solidFill>
                   <a:srgbClr val="B86E1E"/>
                 </a:solidFill>
